--- a/docs/DB_주문_시연_발표.pptx
+++ b/docs/DB_주문_시연_발표.pptx
@@ -2,25 +2,25 @@
 <file path=ppt/presentation.xml><?xml version="1.0" encoding="utf-8"?>
 <p:presentation xmlns:p="http://schemas.openxmlformats.org/presentationml/2006/main">
   <p:sldMasterIdLst>
-    <p:sldMasterId xmlns:r="http://schemas.openxmlformats.org/officeDocument/2006/relationships" id="2147483648" r:id="R96f33c9327114a21"/>
+    <p:sldMasterId xmlns:r="http://schemas.openxmlformats.org/officeDocument/2006/relationships" id="2147483648" r:id="R33b353f9e8574a46"/>
   </p:sldMasterIdLst>
   <p:notesMasterIdLst>
-    <p:notesMasterId xmlns:r="http://schemas.openxmlformats.org/officeDocument/2006/relationships" r:id="Re7c15943853a44f6"/>
+    <p:notesMasterId xmlns:r="http://schemas.openxmlformats.org/officeDocument/2006/relationships" r:id="R56410531d4a84a96"/>
   </p:notesMasterIdLst>
   <p:sldIdLst>
-    <p:sldId xmlns:r="http://schemas.openxmlformats.org/officeDocument/2006/relationships" id="256" r:id="Rbeabf1b3d779408a"/>
-    <p:sldId xmlns:r="http://schemas.openxmlformats.org/officeDocument/2006/relationships" id="257" r:id="R62d4a90e020d4f76"/>
-    <p:sldId xmlns:r="http://schemas.openxmlformats.org/officeDocument/2006/relationships" id="258" r:id="R487c1c5b3ba74114"/>
-    <p:sldId xmlns:r="http://schemas.openxmlformats.org/officeDocument/2006/relationships" id="259" r:id="R05ff8bc1637d487d"/>
-    <p:sldId xmlns:r="http://schemas.openxmlformats.org/officeDocument/2006/relationships" id="260" r:id="Rdf6912190e944f7a"/>
-    <p:sldId xmlns:r="http://schemas.openxmlformats.org/officeDocument/2006/relationships" id="261" r:id="R7c59eebdc60d4a1d"/>
-    <p:sldId xmlns:r="http://schemas.openxmlformats.org/officeDocument/2006/relationships" id="262" r:id="Rf112ac70762c4635"/>
-    <p:sldId xmlns:r="http://schemas.openxmlformats.org/officeDocument/2006/relationships" id="263" r:id="R0d11365f9d0a40e8"/>
-    <p:sldId xmlns:r="http://schemas.openxmlformats.org/officeDocument/2006/relationships" id="264" r:id="Rf4ca206d9adf468d"/>
-    <p:sldId xmlns:r="http://schemas.openxmlformats.org/officeDocument/2006/relationships" id="265" r:id="R6f7a8da01bb14afd"/>
-    <p:sldId xmlns:r="http://schemas.openxmlformats.org/officeDocument/2006/relationships" id="266" r:id="R76dcf0219c294248"/>
-    <p:sldId xmlns:r="http://schemas.openxmlformats.org/officeDocument/2006/relationships" id="267" r:id="Ra72600c6127b47c1"/>
-    <p:sldId xmlns:r="http://schemas.openxmlformats.org/officeDocument/2006/relationships" id="268" r:id="Rfd279efab1fe4fb9"/>
+    <p:sldId xmlns:r="http://schemas.openxmlformats.org/officeDocument/2006/relationships" id="256" r:id="R0411a1242a5e4d48"/>
+    <p:sldId xmlns:r="http://schemas.openxmlformats.org/officeDocument/2006/relationships" id="257" r:id="R982414abd9d449dc"/>
+    <p:sldId xmlns:r="http://schemas.openxmlformats.org/officeDocument/2006/relationships" id="258" r:id="R5dd633ebfd2348d4"/>
+    <p:sldId xmlns:r="http://schemas.openxmlformats.org/officeDocument/2006/relationships" id="259" r:id="Rcc508755e2304df5"/>
+    <p:sldId xmlns:r="http://schemas.openxmlformats.org/officeDocument/2006/relationships" id="260" r:id="R1aa07e3f405c48d7"/>
+    <p:sldId xmlns:r="http://schemas.openxmlformats.org/officeDocument/2006/relationships" id="261" r:id="R8239ab6518594e64"/>
+    <p:sldId xmlns:r="http://schemas.openxmlformats.org/officeDocument/2006/relationships" id="262" r:id="R602d06d53aed46bd"/>
+    <p:sldId xmlns:r="http://schemas.openxmlformats.org/officeDocument/2006/relationships" id="263" r:id="R77d26c0ec1454d88"/>
+    <p:sldId xmlns:r="http://schemas.openxmlformats.org/officeDocument/2006/relationships" id="264" r:id="R0237bc04989140dd"/>
+    <p:sldId xmlns:r="http://schemas.openxmlformats.org/officeDocument/2006/relationships" id="265" r:id="R2b911f52ee274807"/>
+    <p:sldId xmlns:r="http://schemas.openxmlformats.org/officeDocument/2006/relationships" id="266" r:id="Rd9f474a25e95478c"/>
+    <p:sldId xmlns:r="http://schemas.openxmlformats.org/officeDocument/2006/relationships" id="267" r:id="R796bb9de978541b6"/>
+    <p:sldId xmlns:r="http://schemas.openxmlformats.org/officeDocument/2006/relationships" id="268" r:id="R1f4037f6f57c49a7"/>
   </p:sldIdLst>
   <p:sldSz cx="12192000" cy="6858000"/>
   <p:notesSz cx="6858000" cy="9144000"/>
@@ -1482,7 +1482,7 @@
   </p:cSld>
   <p:clrMap bg1="lt1" tx1="dk1" bg2="lt2" tx2="dk2" accent1="accent1" accent2="accent2" accent3="accent3" accent4="accent4" accent5="accent5" accent6="accent6" hlink="hlink" folHlink="folHlink"/>
   <p:sldLayoutIdLst>
-    <p:sldLayoutId xmlns:r="http://schemas.openxmlformats.org/officeDocument/2006/relationships" id="2147483649" r:id="R33114321a2de4dd6"/>
+    <p:sldLayoutId xmlns:r="http://schemas.openxmlformats.org/officeDocument/2006/relationships" id="2147483649" r:id="Rad634e3abfda43a2"/>
   </p:sldLayoutIdLst>
   <p:txStyles>
     <p:titleStyle>
@@ -2062,6 +2062,7 @@
           <a:lstStyle xmlns:a="http://schemas.openxmlformats.org/drawingml/2006/main"/>
           <a:p xmlns:a="http://schemas.openxmlformats.org/drawingml/2006/main">
             <a:pPr>
+              <a:buNone/>
               <a:defRPr sz="1350" b="1">
                 <a:solidFill>
                   <a:srgbClr val="126C70"/>
@@ -2119,6 +2120,7 @@
           <a:lstStyle xmlns:a="http://schemas.openxmlformats.org/drawingml/2006/main"/>
           <a:p xmlns:a="http://schemas.openxmlformats.org/drawingml/2006/main">
             <a:pPr>
+              <a:buNone/>
               <a:defRPr sz="3150" b="1">
                 <a:solidFill>
                   <a:srgbClr val="132D3D"/>
@@ -2176,6 +2178,7 @@
           <a:lstStyle xmlns:a="http://schemas.openxmlformats.org/drawingml/2006/main"/>
           <a:p xmlns:a="http://schemas.openxmlformats.org/drawingml/2006/main">
             <a:pPr>
+              <a:buNone/>
               <a:defRPr sz="1200" b="0">
                 <a:solidFill>
                   <a:srgbClr val="526775"/>
@@ -2233,6 +2236,7 @@
           <a:lstStyle xmlns:a="http://schemas.openxmlformats.org/drawingml/2006/main"/>
           <a:p xmlns:a="http://schemas.openxmlformats.org/drawingml/2006/main">
             <a:pPr>
+              <a:buNone/>
               <a:defRPr sz="1500" b="1">
                 <a:solidFill>
                   <a:srgbClr val="126C70"/>
@@ -2290,6 +2294,7 @@
           <a:lstStyle xmlns:a="http://schemas.openxmlformats.org/drawingml/2006/main"/>
           <a:p xmlns:a="http://schemas.openxmlformats.org/drawingml/2006/main">
             <a:pPr>
+              <a:buNone/>
               <a:defRPr sz="2250" b="1">
                 <a:solidFill>
                   <a:srgbClr val="126C70"/>
@@ -2347,6 +2352,7 @@
           <a:lstStyle xmlns:a="http://schemas.openxmlformats.org/drawingml/2006/main"/>
           <a:p xmlns:a="http://schemas.openxmlformats.org/drawingml/2006/main">
             <a:pPr>
+              <a:buNone/>
               <a:defRPr sz="1950" b="0">
                 <a:solidFill>
                   <a:srgbClr val="526775"/>
@@ -2370,6 +2376,7 @@
           </a:p>
           <a:p xmlns:a="http://schemas.openxmlformats.org/drawingml/2006/main">
             <a:pPr>
+              <a:buNone/>
               <a:defRPr sz="1950" b="0">
                 <a:solidFill>
                   <a:srgbClr val="526775"/>
@@ -2395,14 +2402,14 @@
       </p:sp>
       <p:pic>
         <p:nvPicPr>
-          <p:cNvPr id="15" name=""/>
+          <p:cNvPr id="17" name=""/>
           <p:cNvPicPr>
             <a:picLocks xmlns:a="http://schemas.openxmlformats.org/drawingml/2006/main" noChangeAspect="1"/>
           </p:cNvPicPr>
           <p:nvPr/>
         </p:nvPicPr>
         <p:blipFill>
-          <a:blip xmlns:r="http://schemas.openxmlformats.org/officeDocument/2006/relationships" xmlns:a="http://schemas.openxmlformats.org/drawingml/2006/main" r:embed="Rb02efc314eed41ee"/>
+          <a:blip xmlns:r="http://schemas.openxmlformats.org/officeDocument/2006/relationships" xmlns:a="http://schemas.openxmlformats.org/drawingml/2006/main" r:embed="Rcbca8e908ae84946"/>
           <a:stretch xmlns:a="http://schemas.openxmlformats.org/drawingml/2006/main"/>
         </p:blipFill>
         <p:spPr>
@@ -2449,6 +2456,7 @@
           <a:lstStyle xmlns:a="http://schemas.openxmlformats.org/drawingml/2006/main"/>
           <a:p xmlns:a="http://schemas.openxmlformats.org/drawingml/2006/main">
             <a:pPr>
+              <a:buNone/>
               <a:defRPr sz="1725" b="0">
                 <a:solidFill>
                   <a:srgbClr val="132D3D"/>
@@ -2467,7 +2475,18 @@
                 <a:ea typeface="Malgun Gothic"/>
                 <a:cs typeface="Malgun Gothic"/>
               </a:rPr>
-              <a:t>양석호  |  코드 실행 후 설명하는 발표</a:t>
+              <a:t>3조</a:t>
+            </a:r>
+            <a:r>
+              <a:rPr sz="1725" b="0">
+                <a:solidFill>
+                  <a:srgbClr val="132D3D"/>
+                </a:solidFill>
+                <a:latin typeface="Malgun Gothic"/>
+                <a:ea typeface="Malgun Gothic"/>
+                <a:cs typeface="Malgun Gothic"/>
+              </a:rPr>
+              <a:t>  |  코드 실행 후 설명하는 발표</a:t>
             </a:r>
           </a:p>
         </p:txBody>
@@ -2535,6 +2554,7 @@
           <a:lstStyle xmlns:a="http://schemas.openxmlformats.org/drawingml/2006/main"/>
           <a:p xmlns:a="http://schemas.openxmlformats.org/drawingml/2006/main">
             <a:pPr>
+              <a:buNone/>
               <a:defRPr sz="1350" b="1">
                 <a:solidFill>
                   <a:srgbClr val="126C70"/>
@@ -2592,6 +2612,7 @@
           <a:lstStyle xmlns:a="http://schemas.openxmlformats.org/drawingml/2006/main"/>
           <a:p xmlns:a="http://schemas.openxmlformats.org/drawingml/2006/main">
             <a:pPr>
+              <a:buNone/>
               <a:defRPr sz="3150" b="1">
                 <a:solidFill>
                   <a:srgbClr val="132D3D"/>
@@ -2649,6 +2670,7 @@
           <a:lstStyle xmlns:a="http://schemas.openxmlformats.org/drawingml/2006/main"/>
           <a:p xmlns:a="http://schemas.openxmlformats.org/drawingml/2006/main">
             <a:pPr>
+              <a:buNone/>
               <a:defRPr sz="1200" b="0">
                 <a:solidFill>
                   <a:srgbClr val="526775"/>
@@ -2706,6 +2728,7 @@
           <a:lstStyle xmlns:a="http://schemas.openxmlformats.org/drawingml/2006/main"/>
           <a:p xmlns:a="http://schemas.openxmlformats.org/drawingml/2006/main">
             <a:pPr>
+              <a:buNone/>
               <a:defRPr sz="1500" b="1">
                 <a:solidFill>
                   <a:srgbClr val="126C70"/>
@@ -2763,6 +2786,7 @@
           <a:lstStyle xmlns:a="http://schemas.openxmlformats.org/drawingml/2006/main"/>
           <a:p xmlns:a="http://schemas.openxmlformats.org/drawingml/2006/main">
             <a:pPr>
+              <a:buNone/>
               <a:defRPr sz="2100" b="0">
                 <a:solidFill>
                   <a:srgbClr val="132D3D"/>
@@ -2786,6 +2810,7 @@
           </a:p>
           <a:p xmlns:a="http://schemas.openxmlformats.org/drawingml/2006/main">
             <a:pPr>
+              <a:buNone/>
               <a:defRPr sz="2100" b="0">
                 <a:solidFill>
                   <a:srgbClr val="132D3D"/>
@@ -2809,6 +2834,7 @@
           </a:p>
           <a:p xmlns:a="http://schemas.openxmlformats.org/drawingml/2006/main">
             <a:pPr>
+              <a:buNone/>
               <a:defRPr sz="2100" b="0">
                 <a:solidFill>
                   <a:srgbClr val="132D3D"/>
@@ -2832,6 +2858,7 @@
           </a:p>
           <a:p xmlns:a="http://schemas.openxmlformats.org/drawingml/2006/main">
             <a:pPr>
+              <a:buNone/>
               <a:defRPr sz="2100" b="0">
                 <a:solidFill>
                   <a:srgbClr val="132D3D"/>
@@ -2889,6 +2916,7 @@
           <a:lstStyle xmlns:a="http://schemas.openxmlformats.org/drawingml/2006/main"/>
           <a:p xmlns:a="http://schemas.openxmlformats.org/drawingml/2006/main">
             <a:pPr>
+              <a:buNone/>
               <a:defRPr sz="1800" b="1">
                 <a:solidFill>
                   <a:srgbClr val="126C70"/>
@@ -2914,7 +2942,7 @@
       </p:sp>
       <p:graphicFrame>
         <p:nvGraphicFramePr>
-          <p:cNvPr id="14" name=""/>
+          <p:cNvPr id="16" name=""/>
           <p:cNvGraphicFramePr/>
           <p:nvPr/>
         </p:nvGraphicFramePr>
@@ -3247,6 +3275,7 @@
           <a:lstStyle xmlns:a="http://schemas.openxmlformats.org/drawingml/2006/main"/>
           <a:p xmlns:a="http://schemas.openxmlformats.org/drawingml/2006/main">
             <a:pPr>
+              <a:buNone/>
               <a:defRPr sz="1350" b="1">
                 <a:solidFill>
                   <a:srgbClr val="126C70"/>
@@ -3304,6 +3333,7 @@
           <a:lstStyle xmlns:a="http://schemas.openxmlformats.org/drawingml/2006/main"/>
           <a:p xmlns:a="http://schemas.openxmlformats.org/drawingml/2006/main">
             <a:pPr>
+              <a:buNone/>
               <a:defRPr sz="3150" b="1">
                 <a:solidFill>
                   <a:srgbClr val="132D3D"/>
@@ -3361,6 +3391,7 @@
           <a:lstStyle xmlns:a="http://schemas.openxmlformats.org/drawingml/2006/main"/>
           <a:p xmlns:a="http://schemas.openxmlformats.org/drawingml/2006/main">
             <a:pPr>
+              <a:buNone/>
               <a:defRPr sz="1200" b="0">
                 <a:solidFill>
                   <a:srgbClr val="526775"/>
@@ -3418,6 +3449,7 @@
           <a:lstStyle xmlns:a="http://schemas.openxmlformats.org/drawingml/2006/main"/>
           <a:p xmlns:a="http://schemas.openxmlformats.org/drawingml/2006/main">
             <a:pPr>
+              <a:buNone/>
               <a:defRPr sz="1500" b="1">
                 <a:solidFill>
                   <a:srgbClr val="126C70"/>
@@ -3475,6 +3507,7 @@
           <a:lstStyle xmlns:a="http://schemas.openxmlformats.org/drawingml/2006/main"/>
           <a:p xmlns:a="http://schemas.openxmlformats.org/drawingml/2006/main">
             <a:pPr>
+              <a:buNone/>
               <a:defRPr sz="3300" b="1">
                 <a:solidFill>
                   <a:srgbClr val="126C70"/>
@@ -3500,7 +3533,7 @@
       </p:sp>
       <p:graphicFrame>
         <p:nvGraphicFramePr>
-          <p:cNvPr id="13" name=""/>
+          <p:cNvPr id="15" name=""/>
           <p:cNvGraphicFramePr/>
           <p:nvPr/>
         </p:nvGraphicFramePr>
@@ -3754,6 +3787,7 @@
           <a:lstStyle xmlns:a="http://schemas.openxmlformats.org/drawingml/2006/main"/>
           <a:p xmlns:a="http://schemas.openxmlformats.org/drawingml/2006/main">
             <a:pPr>
+              <a:buNone/>
               <a:defRPr sz="1875" b="1">
                 <a:solidFill>
                   <a:srgbClr val="132D3D"/>
@@ -3840,6 +3874,7 @@
           <a:lstStyle xmlns:a="http://schemas.openxmlformats.org/drawingml/2006/main"/>
           <a:p xmlns:a="http://schemas.openxmlformats.org/drawingml/2006/main">
             <a:pPr>
+              <a:buNone/>
               <a:defRPr sz="1350" b="1">
                 <a:solidFill>
                   <a:srgbClr val="126C70"/>
@@ -3897,6 +3932,7 @@
           <a:lstStyle xmlns:a="http://schemas.openxmlformats.org/drawingml/2006/main"/>
           <a:p xmlns:a="http://schemas.openxmlformats.org/drawingml/2006/main">
             <a:pPr>
+              <a:buNone/>
               <a:defRPr sz="3150" b="1">
                 <a:solidFill>
                   <a:srgbClr val="132D3D"/>
@@ -3954,6 +3990,7 @@
           <a:lstStyle xmlns:a="http://schemas.openxmlformats.org/drawingml/2006/main"/>
           <a:p xmlns:a="http://schemas.openxmlformats.org/drawingml/2006/main">
             <a:pPr>
+              <a:buNone/>
               <a:defRPr sz="1200" b="0">
                 <a:solidFill>
                   <a:srgbClr val="526775"/>
@@ -4011,6 +4048,7 @@
           <a:lstStyle xmlns:a="http://schemas.openxmlformats.org/drawingml/2006/main"/>
           <a:p xmlns:a="http://schemas.openxmlformats.org/drawingml/2006/main">
             <a:pPr>
+              <a:buNone/>
               <a:defRPr sz="1500" b="1">
                 <a:solidFill>
                   <a:srgbClr val="126C70"/>
@@ -4068,6 +4106,7 @@
           <a:lstStyle xmlns:a="http://schemas.openxmlformats.org/drawingml/2006/main"/>
           <a:p xmlns:a="http://schemas.openxmlformats.org/drawingml/2006/main">
             <a:pPr>
+              <a:buNone/>
               <a:defRPr sz="1875" b="0">
                 <a:solidFill>
                   <a:srgbClr val="132D3D"/>
@@ -4091,6 +4130,7 @@
           </a:p>
           <a:p xmlns:a="http://schemas.openxmlformats.org/drawingml/2006/main">
             <a:pPr>
+              <a:buNone/>
               <a:defRPr sz="1875" b="0">
                 <a:solidFill>
                   <a:srgbClr val="132D3D"/>
@@ -4119,6 +4159,7 @@
           </a:p>
           <a:p xmlns:a="http://schemas.openxmlformats.org/drawingml/2006/main">
             <a:pPr>
+              <a:buNone/>
               <a:defRPr sz="1875" b="0">
                 <a:solidFill>
                   <a:srgbClr val="132D3D"/>
@@ -4142,6 +4183,7 @@
           </a:p>
           <a:p xmlns:a="http://schemas.openxmlformats.org/drawingml/2006/main">
             <a:pPr>
+              <a:buNone/>
               <a:defRPr sz="1875" b="0">
                 <a:solidFill>
                   <a:srgbClr val="132D3D"/>
@@ -4199,6 +4241,7 @@
           <a:lstStyle xmlns:a="http://schemas.openxmlformats.org/drawingml/2006/main"/>
           <a:p xmlns:a="http://schemas.openxmlformats.org/drawingml/2006/main">
             <a:pPr>
+              <a:buNone/>
               <a:defRPr sz="5400" b="1">
                 <a:solidFill>
                   <a:srgbClr val="126C70"/>
@@ -4256,6 +4299,7 @@
           <a:lstStyle xmlns:a="http://schemas.openxmlformats.org/drawingml/2006/main"/>
           <a:p xmlns:a="http://schemas.openxmlformats.org/drawingml/2006/main">
             <a:pPr>
+              <a:buNone/>
               <a:defRPr sz="2250" b="0">
                 <a:solidFill>
                   <a:srgbClr val="132D3D"/>
@@ -4279,6 +4323,7 @@
           </a:p>
           <a:p xmlns:a="http://schemas.openxmlformats.org/drawingml/2006/main">
             <a:pPr>
+              <a:buNone/>
               <a:defRPr sz="2250" b="0">
                 <a:solidFill>
                   <a:srgbClr val="132D3D"/>
@@ -4336,6 +4381,7 @@
           <a:lstStyle xmlns:a="http://schemas.openxmlformats.org/drawingml/2006/main"/>
           <a:p xmlns:a="http://schemas.openxmlformats.org/drawingml/2006/main">
             <a:pPr>
+              <a:buNone/>
               <a:defRPr sz="2100" b="0">
                 <a:solidFill>
                   <a:srgbClr val="526775"/>
@@ -4422,6 +4468,7 @@
           <a:lstStyle xmlns:a="http://schemas.openxmlformats.org/drawingml/2006/main"/>
           <a:p xmlns:a="http://schemas.openxmlformats.org/drawingml/2006/main">
             <a:pPr>
+              <a:buNone/>
               <a:defRPr sz="1350" b="1">
                 <a:solidFill>
                   <a:srgbClr val="126C70"/>
@@ -4479,6 +4526,7 @@
           <a:lstStyle xmlns:a="http://schemas.openxmlformats.org/drawingml/2006/main"/>
           <a:p xmlns:a="http://schemas.openxmlformats.org/drawingml/2006/main">
             <a:pPr>
+              <a:buNone/>
               <a:defRPr sz="3150" b="1">
                 <a:solidFill>
                   <a:srgbClr val="132D3D"/>
@@ -4536,6 +4584,7 @@
           <a:lstStyle xmlns:a="http://schemas.openxmlformats.org/drawingml/2006/main"/>
           <a:p xmlns:a="http://schemas.openxmlformats.org/drawingml/2006/main">
             <a:pPr>
+              <a:buNone/>
               <a:defRPr sz="1200" b="0">
                 <a:solidFill>
                   <a:srgbClr val="526775"/>
@@ -4593,6 +4642,7 @@
           <a:lstStyle xmlns:a="http://schemas.openxmlformats.org/drawingml/2006/main"/>
           <a:p xmlns:a="http://schemas.openxmlformats.org/drawingml/2006/main">
             <a:pPr>
+              <a:buNone/>
               <a:defRPr sz="1500" b="1">
                 <a:solidFill>
                   <a:srgbClr val="126C70"/>
@@ -4618,7 +4668,7 @@
       </p:sp>
       <p:graphicFrame>
         <p:nvGraphicFramePr>
-          <p:cNvPr id="11" name=""/>
+          <p:cNvPr id="13" name=""/>
           <p:cNvGraphicFramePr/>
           <p:nvPr/>
         </p:nvGraphicFramePr>
@@ -4922,6 +4972,7 @@
           <a:lstStyle xmlns:a="http://schemas.openxmlformats.org/drawingml/2006/main"/>
           <a:p xmlns:a="http://schemas.openxmlformats.org/drawingml/2006/main">
             <a:pPr>
+              <a:buNone/>
               <a:defRPr sz="2325" b="1">
                 <a:solidFill>
                   <a:srgbClr val="126C70"/>
@@ -5008,6 +5059,7 @@
           <a:lstStyle xmlns:a="http://schemas.openxmlformats.org/drawingml/2006/main"/>
           <a:p xmlns:a="http://schemas.openxmlformats.org/drawingml/2006/main">
             <a:pPr>
+              <a:buNone/>
               <a:defRPr sz="1350" b="1">
                 <a:solidFill>
                   <a:srgbClr val="126C70"/>
@@ -5065,6 +5117,7 @@
           <a:lstStyle xmlns:a="http://schemas.openxmlformats.org/drawingml/2006/main"/>
           <a:p xmlns:a="http://schemas.openxmlformats.org/drawingml/2006/main">
             <a:pPr>
+              <a:buNone/>
               <a:defRPr sz="3150" b="1">
                 <a:solidFill>
                   <a:srgbClr val="132D3D"/>
@@ -5122,6 +5175,7 @@
           <a:lstStyle xmlns:a="http://schemas.openxmlformats.org/drawingml/2006/main"/>
           <a:p xmlns:a="http://schemas.openxmlformats.org/drawingml/2006/main">
             <a:pPr>
+              <a:buNone/>
               <a:defRPr sz="1200" b="0">
                 <a:solidFill>
                   <a:srgbClr val="526775"/>
@@ -5179,6 +5233,7 @@
           <a:lstStyle xmlns:a="http://schemas.openxmlformats.org/drawingml/2006/main"/>
           <a:p xmlns:a="http://schemas.openxmlformats.org/drawingml/2006/main">
             <a:pPr>
+              <a:buNone/>
               <a:defRPr sz="1500" b="1">
                 <a:solidFill>
                   <a:srgbClr val="126C70"/>
@@ -5204,7 +5259,7 @@
       </p:sp>
       <p:graphicFrame>
         <p:nvGraphicFramePr>
-          <p:cNvPr id="11" name=""/>
+          <p:cNvPr id="13" name=""/>
           <p:cNvGraphicFramePr/>
           <p:nvPr/>
         </p:nvGraphicFramePr>
@@ -5629,6 +5684,7 @@
           <a:lstStyle xmlns:a="http://schemas.openxmlformats.org/drawingml/2006/main"/>
           <a:p xmlns:a="http://schemas.openxmlformats.org/drawingml/2006/main">
             <a:pPr>
+              <a:buNone/>
               <a:defRPr sz="1950" b="1">
                 <a:solidFill>
                   <a:srgbClr val="126C70"/>
@@ -5715,6 +5771,7 @@
           <a:lstStyle xmlns:a="http://schemas.openxmlformats.org/drawingml/2006/main"/>
           <a:p xmlns:a="http://schemas.openxmlformats.org/drawingml/2006/main">
             <a:pPr>
+              <a:buNone/>
               <a:defRPr sz="2400" b="1">
                 <a:solidFill>
                   <a:srgbClr val="132D3D"/>
@@ -5740,14 +5797,14 @@
       </p:sp>
       <p:pic>
         <p:nvPicPr>
-          <p:cNvPr id="5" name=""/>
+          <p:cNvPr id="7" name=""/>
           <p:cNvPicPr>
             <a:picLocks xmlns:a="http://schemas.openxmlformats.org/drawingml/2006/main" noChangeAspect="1"/>
           </p:cNvPicPr>
           <p:nvPr/>
         </p:nvPicPr>
         <p:blipFill>
-          <a:blip xmlns:r="http://schemas.openxmlformats.org/officeDocument/2006/relationships" xmlns:a="http://schemas.openxmlformats.org/drawingml/2006/main" r:embed="R5d6fab0e6fe04c7a"/>
+          <a:blip xmlns:r="http://schemas.openxmlformats.org/officeDocument/2006/relationships" xmlns:a="http://schemas.openxmlformats.org/drawingml/2006/main" r:embed="R04c9311348ac48a9"/>
           <a:stretch xmlns:a="http://schemas.openxmlformats.org/drawingml/2006/main"/>
         </p:blipFill>
         <p:spPr>
@@ -5794,6 +5851,7 @@
           <a:lstStyle xmlns:a="http://schemas.openxmlformats.org/drawingml/2006/main"/>
           <a:p xmlns:a="http://schemas.openxmlformats.org/drawingml/2006/main">
             <a:pPr>
+              <a:buNone/>
               <a:defRPr sz="1500" b="1">
                 <a:solidFill>
                   <a:srgbClr val="126C70"/>
@@ -5880,6 +5938,7 @@
           <a:lstStyle xmlns:a="http://schemas.openxmlformats.org/drawingml/2006/main"/>
           <a:p xmlns:a="http://schemas.openxmlformats.org/drawingml/2006/main">
             <a:pPr>
+              <a:buNone/>
               <a:defRPr sz="1350" b="1">
                 <a:solidFill>
                   <a:srgbClr val="126C70"/>
@@ -5937,6 +5996,7 @@
           <a:lstStyle xmlns:a="http://schemas.openxmlformats.org/drawingml/2006/main"/>
           <a:p xmlns:a="http://schemas.openxmlformats.org/drawingml/2006/main">
             <a:pPr>
+              <a:buNone/>
               <a:defRPr sz="3150" b="1">
                 <a:solidFill>
                   <a:srgbClr val="132D3D"/>
@@ -5994,6 +6054,7 @@
           <a:lstStyle xmlns:a="http://schemas.openxmlformats.org/drawingml/2006/main"/>
           <a:p xmlns:a="http://schemas.openxmlformats.org/drawingml/2006/main">
             <a:pPr>
+              <a:buNone/>
               <a:defRPr sz="1200" b="0">
                 <a:solidFill>
                   <a:srgbClr val="526775"/>
@@ -6051,6 +6112,7 @@
           <a:lstStyle xmlns:a="http://schemas.openxmlformats.org/drawingml/2006/main"/>
           <a:p xmlns:a="http://schemas.openxmlformats.org/drawingml/2006/main">
             <a:pPr>
+              <a:buNone/>
               <a:defRPr sz="1500" b="1">
                 <a:solidFill>
                   <a:srgbClr val="126C70"/>
@@ -6076,7 +6138,7 @@
       </p:sp>
       <p:graphicFrame>
         <p:nvGraphicFramePr>
-          <p:cNvPr id="11" name=""/>
+          <p:cNvPr id="13" name=""/>
           <p:cNvGraphicFramePr/>
           <p:nvPr/>
         </p:nvGraphicFramePr>
@@ -6575,6 +6637,7 @@
           <a:lstStyle xmlns:a="http://schemas.openxmlformats.org/drawingml/2006/main"/>
           <a:p xmlns:a="http://schemas.openxmlformats.org/drawingml/2006/main">
             <a:pPr>
+              <a:buNone/>
               <a:defRPr sz="2250" b="1">
                 <a:solidFill>
                   <a:srgbClr val="126C70"/>
@@ -6661,6 +6724,7 @@
           <a:lstStyle xmlns:a="http://schemas.openxmlformats.org/drawingml/2006/main"/>
           <a:p xmlns:a="http://schemas.openxmlformats.org/drawingml/2006/main">
             <a:pPr>
+              <a:buNone/>
               <a:defRPr sz="1350" b="1">
                 <a:solidFill>
                   <a:srgbClr val="126C70"/>
@@ -6718,6 +6782,7 @@
           <a:lstStyle xmlns:a="http://schemas.openxmlformats.org/drawingml/2006/main"/>
           <a:p xmlns:a="http://schemas.openxmlformats.org/drawingml/2006/main">
             <a:pPr>
+              <a:buNone/>
               <a:defRPr sz="3150" b="1">
                 <a:solidFill>
                   <a:srgbClr val="132D3D"/>
@@ -6775,6 +6840,7 @@
           <a:lstStyle xmlns:a="http://schemas.openxmlformats.org/drawingml/2006/main"/>
           <a:p xmlns:a="http://schemas.openxmlformats.org/drawingml/2006/main">
             <a:pPr>
+              <a:buNone/>
               <a:defRPr sz="1200" b="0">
                 <a:solidFill>
                   <a:srgbClr val="526775"/>
@@ -6832,6 +6898,7 @@
           <a:lstStyle xmlns:a="http://schemas.openxmlformats.org/drawingml/2006/main"/>
           <a:p xmlns:a="http://schemas.openxmlformats.org/drawingml/2006/main">
             <a:pPr>
+              <a:buNone/>
               <a:defRPr sz="1500" b="1">
                 <a:solidFill>
                   <a:srgbClr val="126C70"/>
@@ -6889,6 +6956,7 @@
           <a:lstStyle xmlns:a="http://schemas.openxmlformats.org/drawingml/2006/main"/>
           <a:p xmlns:a="http://schemas.openxmlformats.org/drawingml/2006/main">
             <a:pPr>
+              <a:buNone/>
               <a:defRPr sz="1950" b="0">
                 <a:solidFill>
                   <a:srgbClr val="526775"/>
@@ -6914,7 +6982,7 @@
       </p:sp>
       <p:graphicFrame>
         <p:nvGraphicFramePr>
-          <p:cNvPr id="14" name=""/>
+          <p:cNvPr id="16" name=""/>
           <p:cNvGraphicFramePr/>
           <p:nvPr/>
         </p:nvGraphicFramePr>
@@ -7264,6 +7332,7 @@
           <a:lstStyle xmlns:a="http://schemas.openxmlformats.org/drawingml/2006/main"/>
           <a:p xmlns:a="http://schemas.openxmlformats.org/drawingml/2006/main">
             <a:pPr>
+              <a:buNone/>
               <a:defRPr sz="1950" b="0">
                 <a:solidFill>
                   <a:srgbClr val="132D3D"/>
@@ -7287,6 +7356,7 @@
           </a:p>
           <a:p xmlns:a="http://schemas.openxmlformats.org/drawingml/2006/main">
             <a:pPr>
+              <a:buNone/>
               <a:defRPr sz="1950" b="0">
                 <a:solidFill>
                   <a:srgbClr val="132D3D"/>
@@ -7310,6 +7380,7 @@
           </a:p>
           <a:p xmlns:a="http://schemas.openxmlformats.org/drawingml/2006/main">
             <a:pPr>
+              <a:buNone/>
               <a:defRPr sz="1950" b="0">
                 <a:solidFill>
                   <a:srgbClr val="132D3D"/>
@@ -7367,6 +7438,7 @@
           <a:lstStyle xmlns:a="http://schemas.openxmlformats.org/drawingml/2006/main"/>
           <a:p xmlns:a="http://schemas.openxmlformats.org/drawingml/2006/main">
             <a:pPr>
+              <a:buNone/>
               <a:defRPr sz="1875" b="1">
                 <a:solidFill>
                   <a:srgbClr val="126C70"/>
@@ -7453,6 +7525,7 @@
           <a:lstStyle xmlns:a="http://schemas.openxmlformats.org/drawingml/2006/main"/>
           <a:p xmlns:a="http://schemas.openxmlformats.org/drawingml/2006/main">
             <a:pPr>
+              <a:buNone/>
               <a:defRPr sz="1350" b="1">
                 <a:solidFill>
                   <a:srgbClr val="126C70"/>
@@ -7510,6 +7583,7 @@
           <a:lstStyle xmlns:a="http://schemas.openxmlformats.org/drawingml/2006/main"/>
           <a:p xmlns:a="http://schemas.openxmlformats.org/drawingml/2006/main">
             <a:pPr>
+              <a:buNone/>
               <a:defRPr sz="3150" b="1">
                 <a:solidFill>
                   <a:srgbClr val="132D3D"/>
@@ -7567,6 +7641,7 @@
           <a:lstStyle xmlns:a="http://schemas.openxmlformats.org/drawingml/2006/main"/>
           <a:p xmlns:a="http://schemas.openxmlformats.org/drawingml/2006/main">
             <a:pPr>
+              <a:buNone/>
               <a:defRPr sz="1200" b="0">
                 <a:solidFill>
                   <a:srgbClr val="526775"/>
@@ -7624,6 +7699,7 @@
           <a:lstStyle xmlns:a="http://schemas.openxmlformats.org/drawingml/2006/main"/>
           <a:p xmlns:a="http://schemas.openxmlformats.org/drawingml/2006/main">
             <a:pPr>
+              <a:buNone/>
               <a:defRPr sz="1500" b="1">
                 <a:solidFill>
                   <a:srgbClr val="126C70"/>
@@ -7681,6 +7757,7 @@
           <a:lstStyle xmlns:a="http://schemas.openxmlformats.org/drawingml/2006/main"/>
           <a:p xmlns:a="http://schemas.openxmlformats.org/drawingml/2006/main">
             <a:pPr>
+              <a:buNone/>
               <a:defRPr sz="2025" b="0">
                 <a:solidFill>
                   <a:srgbClr val="132D3D"/>
@@ -7704,6 +7781,7 @@
           </a:p>
           <a:p xmlns:a="http://schemas.openxmlformats.org/drawingml/2006/main">
             <a:pPr>
+              <a:buNone/>
               <a:defRPr sz="2025" b="0">
                 <a:solidFill>
                   <a:srgbClr val="132D3D"/>
@@ -7727,6 +7805,7 @@
           </a:p>
           <a:p xmlns:a="http://schemas.openxmlformats.org/drawingml/2006/main">
             <a:pPr>
+              <a:buNone/>
               <a:defRPr sz="2025" b="0">
                 <a:solidFill>
                   <a:srgbClr val="132D3D"/>
@@ -7750,6 +7829,7 @@
           </a:p>
           <a:p xmlns:a="http://schemas.openxmlformats.org/drawingml/2006/main">
             <a:pPr>
+              <a:buNone/>
               <a:defRPr sz="2025" b="0">
                 <a:solidFill>
                   <a:srgbClr val="132D3D"/>
@@ -7807,6 +7887,7 @@
           <a:lstStyle xmlns:a="http://schemas.openxmlformats.org/drawingml/2006/main"/>
           <a:p xmlns:a="http://schemas.openxmlformats.org/drawingml/2006/main">
             <a:pPr>
+              <a:buNone/>
               <a:defRPr sz="2400" b="1">
                 <a:solidFill>
                   <a:srgbClr val="126C70"/>
@@ -7864,6 +7945,7 @@
           <a:lstStyle xmlns:a="http://schemas.openxmlformats.org/drawingml/2006/main"/>
           <a:p xmlns:a="http://schemas.openxmlformats.org/drawingml/2006/main">
             <a:pPr>
+              <a:buNone/>
               <a:defRPr sz="2100" b="0">
                 <a:solidFill>
                   <a:srgbClr val="132D3D"/>
@@ -7887,6 +7969,7 @@
           </a:p>
           <a:p xmlns:a="http://schemas.openxmlformats.org/drawingml/2006/main">
             <a:pPr>
+              <a:buNone/>
               <a:defRPr sz="2100" b="0">
                 <a:solidFill>
                   <a:srgbClr val="132D3D"/>
@@ -7973,6 +8056,7 @@
           <a:lstStyle xmlns:a="http://schemas.openxmlformats.org/drawingml/2006/main"/>
           <a:p xmlns:a="http://schemas.openxmlformats.org/drawingml/2006/main">
             <a:pPr>
+              <a:buNone/>
               <a:defRPr sz="1350" b="1">
                 <a:solidFill>
                   <a:srgbClr val="126C70"/>
@@ -8030,6 +8114,7 @@
           <a:lstStyle xmlns:a="http://schemas.openxmlformats.org/drawingml/2006/main"/>
           <a:p xmlns:a="http://schemas.openxmlformats.org/drawingml/2006/main">
             <a:pPr>
+              <a:buNone/>
               <a:defRPr sz="3150" b="1">
                 <a:solidFill>
                   <a:srgbClr val="132D3D"/>
@@ -8087,6 +8172,7 @@
           <a:lstStyle xmlns:a="http://schemas.openxmlformats.org/drawingml/2006/main"/>
           <a:p xmlns:a="http://schemas.openxmlformats.org/drawingml/2006/main">
             <a:pPr>
+              <a:buNone/>
               <a:defRPr sz="1200" b="0">
                 <a:solidFill>
                   <a:srgbClr val="526775"/>
@@ -8144,6 +8230,7 @@
           <a:lstStyle xmlns:a="http://schemas.openxmlformats.org/drawingml/2006/main"/>
           <a:p xmlns:a="http://schemas.openxmlformats.org/drawingml/2006/main">
             <a:pPr>
+              <a:buNone/>
               <a:defRPr sz="1500" b="1">
                 <a:solidFill>
                   <a:srgbClr val="126C70"/>
@@ -8169,7 +8256,7 @@
       </p:sp>
       <p:graphicFrame>
         <p:nvGraphicFramePr>
-          <p:cNvPr id="11" name=""/>
+          <p:cNvPr id="13" name=""/>
           <p:cNvGraphicFramePr/>
           <p:nvPr/>
         </p:nvGraphicFramePr>
@@ -8594,6 +8681,7 @@
           <a:lstStyle xmlns:a="http://schemas.openxmlformats.org/drawingml/2006/main"/>
           <a:p xmlns:a="http://schemas.openxmlformats.org/drawingml/2006/main">
             <a:pPr>
+              <a:buNone/>
               <a:defRPr sz="2100" b="1">
                 <a:solidFill>
                   <a:srgbClr val="126C70"/>
@@ -8680,6 +8768,7 @@
           <a:lstStyle xmlns:a="http://schemas.openxmlformats.org/drawingml/2006/main"/>
           <a:p xmlns:a="http://schemas.openxmlformats.org/drawingml/2006/main">
             <a:pPr>
+              <a:buNone/>
               <a:defRPr sz="1350" b="1">
                 <a:solidFill>
                   <a:srgbClr val="126C70"/>
@@ -8737,6 +8826,7 @@
           <a:lstStyle xmlns:a="http://schemas.openxmlformats.org/drawingml/2006/main"/>
           <a:p xmlns:a="http://schemas.openxmlformats.org/drawingml/2006/main">
             <a:pPr>
+              <a:buNone/>
               <a:defRPr sz="3150" b="1">
                 <a:solidFill>
                   <a:srgbClr val="132D3D"/>
@@ -8794,6 +8884,7 @@
           <a:lstStyle xmlns:a="http://schemas.openxmlformats.org/drawingml/2006/main"/>
           <a:p xmlns:a="http://schemas.openxmlformats.org/drawingml/2006/main">
             <a:pPr>
+              <a:buNone/>
               <a:defRPr sz="1200" b="0">
                 <a:solidFill>
                   <a:srgbClr val="526775"/>
@@ -8851,6 +8942,7 @@
           <a:lstStyle xmlns:a="http://schemas.openxmlformats.org/drawingml/2006/main"/>
           <a:p xmlns:a="http://schemas.openxmlformats.org/drawingml/2006/main">
             <a:pPr>
+              <a:buNone/>
               <a:defRPr sz="1500" b="1">
                 <a:solidFill>
                   <a:srgbClr val="126C70"/>
@@ -8908,6 +9000,7 @@
           <a:lstStyle xmlns:a="http://schemas.openxmlformats.org/drawingml/2006/main"/>
           <a:p xmlns:a="http://schemas.openxmlformats.org/drawingml/2006/main">
             <a:pPr>
+              <a:buNone/>
               <a:defRPr sz="2025" b="0">
                 <a:solidFill>
                   <a:srgbClr val="132D3D"/>
@@ -8931,6 +9024,7 @@
           </a:p>
           <a:p xmlns:a="http://schemas.openxmlformats.org/drawingml/2006/main">
             <a:pPr>
+              <a:buNone/>
               <a:defRPr sz="2025" b="0">
                 <a:solidFill>
                   <a:srgbClr val="132D3D"/>
@@ -8954,6 +9048,7 @@
           </a:p>
           <a:p xmlns:a="http://schemas.openxmlformats.org/drawingml/2006/main">
             <a:pPr>
+              <a:buNone/>
               <a:defRPr sz="2025" b="0">
                 <a:solidFill>
                   <a:srgbClr val="132D3D"/>
@@ -8977,6 +9072,7 @@
           </a:p>
           <a:p xmlns:a="http://schemas.openxmlformats.org/drawingml/2006/main">
             <a:pPr>
+              <a:buNone/>
               <a:defRPr sz="2025" b="0">
                 <a:solidFill>
                   <a:srgbClr val="132D3D"/>
@@ -9000,6 +9096,7 @@
           </a:p>
           <a:p xmlns:a="http://schemas.openxmlformats.org/drawingml/2006/main">
             <a:pPr>
+              <a:buNone/>
               <a:defRPr sz="2025" b="0">
                 <a:solidFill>
                   <a:srgbClr val="132D3D"/>
@@ -9023,6 +9120,7 @@
           </a:p>
           <a:p xmlns:a="http://schemas.openxmlformats.org/drawingml/2006/main">
             <a:pPr>
+              <a:buNone/>
               <a:defRPr sz="2025" b="0">
                 <a:solidFill>
                   <a:srgbClr val="132D3D"/>
@@ -9046,6 +9144,7 @@
           </a:p>
           <a:p xmlns:a="http://schemas.openxmlformats.org/drawingml/2006/main">
             <a:pPr>
+              <a:buNone/>
               <a:defRPr sz="2025" b="0">
                 <a:solidFill>
                   <a:srgbClr val="132D3D"/>
@@ -9103,6 +9202,7 @@
           <a:lstStyle xmlns:a="http://schemas.openxmlformats.org/drawingml/2006/main"/>
           <a:p xmlns:a="http://schemas.openxmlformats.org/drawingml/2006/main">
             <a:pPr>
+              <a:buNone/>
               <a:defRPr sz="2175" b="1">
                 <a:solidFill>
                   <a:srgbClr val="126C70"/>
@@ -9131,6 +9231,7 @@
           </a:p>
           <a:p xmlns:a="http://schemas.openxmlformats.org/drawingml/2006/main">
             <a:pPr>
+              <a:buNone/>
               <a:defRPr sz="2175" b="1">
                 <a:solidFill>
                   <a:srgbClr val="126C70"/>
@@ -9159,6 +9260,7 @@
           </a:p>
           <a:p xmlns:a="http://schemas.openxmlformats.org/drawingml/2006/main">
             <a:pPr>
+              <a:buNone/>
               <a:defRPr sz="2175" b="1">
                 <a:solidFill>
                   <a:srgbClr val="126C70"/>
@@ -9216,6 +9318,7 @@
           <a:lstStyle xmlns:a="http://schemas.openxmlformats.org/drawingml/2006/main"/>
           <a:p xmlns:a="http://schemas.openxmlformats.org/drawingml/2006/main">
             <a:pPr>
+              <a:buNone/>
               <a:defRPr sz="2100" b="1">
                 <a:solidFill>
                   <a:srgbClr val="132D3D"/>
@@ -9302,6 +9405,7 @@
           <a:lstStyle xmlns:a="http://schemas.openxmlformats.org/drawingml/2006/main"/>
           <a:p xmlns:a="http://schemas.openxmlformats.org/drawingml/2006/main">
             <a:pPr>
+              <a:buNone/>
               <a:defRPr sz="1350" b="1">
                 <a:solidFill>
                   <a:srgbClr val="126C70"/>
@@ -9359,6 +9463,7 @@
           <a:lstStyle xmlns:a="http://schemas.openxmlformats.org/drawingml/2006/main"/>
           <a:p xmlns:a="http://schemas.openxmlformats.org/drawingml/2006/main">
             <a:pPr>
+              <a:buNone/>
               <a:defRPr sz="3150" b="1">
                 <a:solidFill>
                   <a:srgbClr val="132D3D"/>
@@ -9416,6 +9521,7 @@
           <a:lstStyle xmlns:a="http://schemas.openxmlformats.org/drawingml/2006/main"/>
           <a:p xmlns:a="http://schemas.openxmlformats.org/drawingml/2006/main">
             <a:pPr>
+              <a:buNone/>
               <a:defRPr sz="1200" b="0">
                 <a:solidFill>
                   <a:srgbClr val="526775"/>
@@ -9473,6 +9579,7 @@
           <a:lstStyle xmlns:a="http://schemas.openxmlformats.org/drawingml/2006/main"/>
           <a:p xmlns:a="http://schemas.openxmlformats.org/drawingml/2006/main">
             <a:pPr>
+              <a:buNone/>
               <a:defRPr sz="1500" b="1">
                 <a:solidFill>
                   <a:srgbClr val="126C70"/>
@@ -9530,6 +9637,7 @@
           <a:lstStyle xmlns:a="http://schemas.openxmlformats.org/drawingml/2006/main"/>
           <a:p xmlns:a="http://schemas.openxmlformats.org/drawingml/2006/main">
             <a:pPr>
+              <a:buNone/>
               <a:defRPr sz="2175" b="1">
                 <a:solidFill>
                   <a:srgbClr val="126C70"/>
@@ -9587,6 +9695,7 @@
           <a:lstStyle xmlns:a="http://schemas.openxmlformats.org/drawingml/2006/main"/>
           <a:p xmlns:a="http://schemas.openxmlformats.org/drawingml/2006/main">
             <a:pPr>
+              <a:buNone/>
               <a:defRPr sz="1950" b="0">
                 <a:solidFill>
                   <a:srgbClr val="132D3D"/>
@@ -9610,6 +9719,7 @@
           </a:p>
           <a:p xmlns:a="http://schemas.openxmlformats.org/drawingml/2006/main">
             <a:pPr>
+              <a:buNone/>
               <a:defRPr sz="1950" b="0">
                 <a:solidFill>
                   <a:srgbClr val="132D3D"/>
@@ -9633,6 +9743,7 @@
           </a:p>
           <a:p xmlns:a="http://schemas.openxmlformats.org/drawingml/2006/main">
             <a:pPr>
+              <a:buNone/>
               <a:defRPr sz="1950" b="0">
                 <a:solidFill>
                   <a:srgbClr val="132D3D"/>
@@ -9656,6 +9767,7 @@
           </a:p>
           <a:p xmlns:a="http://schemas.openxmlformats.org/drawingml/2006/main">
             <a:pPr>
+              <a:buNone/>
               <a:defRPr sz="1950" b="0">
                 <a:solidFill>
                   <a:srgbClr val="132D3D"/>
@@ -9679,6 +9791,7 @@
           </a:p>
           <a:p xmlns:a="http://schemas.openxmlformats.org/drawingml/2006/main">
             <a:pPr>
+              <a:buNone/>
               <a:defRPr sz="1950" b="0">
                 <a:solidFill>
                   <a:srgbClr val="132D3D"/>
@@ -9736,6 +9849,7 @@
           <a:lstStyle xmlns:a="http://schemas.openxmlformats.org/drawingml/2006/main"/>
           <a:p xmlns:a="http://schemas.openxmlformats.org/drawingml/2006/main">
             <a:pPr>
+              <a:buNone/>
               <a:defRPr sz="2175" b="1">
                 <a:solidFill>
                   <a:srgbClr val="126C70"/>
@@ -9793,6 +9907,7 @@
           <a:lstStyle xmlns:a="http://schemas.openxmlformats.org/drawingml/2006/main"/>
           <a:p xmlns:a="http://schemas.openxmlformats.org/drawingml/2006/main">
             <a:pPr>
+              <a:buNone/>
               <a:defRPr sz="1950" b="0">
                 <a:solidFill>
                   <a:srgbClr val="132D3D"/>
@@ -9816,6 +9931,7 @@
           </a:p>
           <a:p xmlns:a="http://schemas.openxmlformats.org/drawingml/2006/main">
             <a:pPr>
+              <a:buNone/>
               <a:defRPr sz="1950" b="0">
                 <a:solidFill>
                   <a:srgbClr val="132D3D"/>
@@ -9839,6 +9955,7 @@
           </a:p>
           <a:p xmlns:a="http://schemas.openxmlformats.org/drawingml/2006/main">
             <a:pPr>
+              <a:buNone/>
               <a:defRPr sz="1950" b="0">
                 <a:solidFill>
                   <a:srgbClr val="132D3D"/>
@@ -9862,6 +9979,7 @@
           </a:p>
           <a:p xmlns:a="http://schemas.openxmlformats.org/drawingml/2006/main">
             <a:pPr>
+              <a:buNone/>
               <a:defRPr sz="1950" b="0">
                 <a:solidFill>
                   <a:srgbClr val="132D3D"/>
@@ -9885,6 +10003,7 @@
           </a:p>
           <a:p xmlns:a="http://schemas.openxmlformats.org/drawingml/2006/main">
             <a:pPr>
+              <a:buNone/>
               <a:defRPr sz="1950" b="0">
                 <a:solidFill>
                   <a:srgbClr val="132D3D"/>
@@ -9942,6 +10061,7 @@
           <a:lstStyle xmlns:a="http://schemas.openxmlformats.org/drawingml/2006/main"/>
           <a:p xmlns:a="http://schemas.openxmlformats.org/drawingml/2006/main">
             <a:pPr>
+              <a:buNone/>
               <a:defRPr sz="2175" b="1">
                 <a:solidFill>
                   <a:srgbClr val="132D3D"/>
